--- a/tmp/答辩.pptx
+++ b/tmp/答辩.pptx
@@ -2700,6 +2700,30 @@
       </p:bgPr>
     </p:bg>
     <p:spTree>
+      <p:pic xmlns:a="http://schemas.openxmlformats.org/drawingml/2006/main" xmlns:r="http://schemas.openxmlformats.org/officeDocument/2006/relationships">
+        <p:nvPicPr>
+          <p:cNvPr id="15" name="Picture 14" descr="image.png"/>
+          <p:cNvPicPr>
+            <a:picLocks noChangeAspect="1"/>
+          </p:cNvPicPr>
+          <p:nvPr/>
+        </p:nvPicPr>
+        <p:blipFill>
+          <a:blip r:embed="rId4"/>
+          <a:stretch>
+            <a:fillRect/>
+          </a:stretch>
+        </p:blipFill>
+        <p:spPr>
+          <a:xfrm>
+            <a:off x="822960" y="3200400"/>
+            <a:ext cx="8778240" cy="3413110"/>
+          </a:xfrm>
+          <a:prstGeom prst="rect">
+            <a:avLst/>
+          </a:prstGeom>
+        </p:spPr>
+      </p:pic>
       <p:nvGrpSpPr>
         <p:cNvPr id="1" name=""/>
         <p:cNvGrpSpPr/>
@@ -2878,28 +2902,6 @@
           </a:ln>
         </p:spPr>
       </p:sp>
-      <p:pic>
-        <p:nvPicPr>
-          <p:cNvPr id="5" name=""/>
-          <p:cNvPicPr>
-            <a:picLocks xmlns:a="http://schemas.openxmlformats.org/drawingml/2006/main" noChangeAspect="1"/>
-          </p:cNvPicPr>
-          <p:nvPr/>
-        </p:nvPicPr>
-        <p:blipFill>
-          <a:blip xmlns:r="http://schemas.openxmlformats.org/officeDocument/2006/relationships" xmlns:a="http://schemas.openxmlformats.org/drawingml/2006/main" r:embed="R2da24d54094146de"/>
-          <a:stretch xmlns:a="http://schemas.openxmlformats.org/drawingml/2006/main"/>
-        </p:blipFill>
-        <p:spPr>
-          <a:xfrm xmlns:a="http://schemas.openxmlformats.org/drawingml/2006/main">
-            <a:off x="952500" y="4070260"/>
-            <a:ext cx="8508111" cy="3308531"/>
-          </a:xfrm>
-          <a:prstGeom xmlns:a="http://schemas.openxmlformats.org/drawingml/2006/main" prst="rect">
-            <a:avLst/>
-          </a:prstGeom>
-        </p:spPr>
-      </p:pic>
       <p:sp>
         <p:nvSpPr>
           <p:cNvPr id="6" name="">
@@ -4154,6 +4156,78 @@
       </p:bgPr>
     </p:bg>
     <p:spTree>
+      <p:pic xmlns:a="http://schemas.openxmlformats.org/drawingml/2006/main" xmlns:r="http://schemas.openxmlformats.org/officeDocument/2006/relationships">
+        <p:nvPicPr>
+          <p:cNvPr id="55" name="Picture 54" descr="val_pr_auc_curve.png"/>
+          <p:cNvPicPr>
+            <a:picLocks noChangeAspect="1"/>
+          </p:cNvPicPr>
+          <p:nvPr/>
+        </p:nvPicPr>
+        <p:blipFill>
+          <a:blip r:embed="rId5"/>
+          <a:stretch>
+            <a:fillRect/>
+          </a:stretch>
+        </p:blipFill>
+        <p:spPr>
+          <a:xfrm>
+            <a:off x="9326880" y="7498079"/>
+            <a:ext cx="3833677" cy="2286000"/>
+          </a:xfrm>
+          <a:prstGeom prst="rect">
+            <a:avLst/>
+          </a:prstGeom>
+        </p:spPr>
+      </p:pic>
+      <p:pic xmlns:a="http://schemas.openxmlformats.org/drawingml/2006/main" xmlns:r="http://schemas.openxmlformats.org/officeDocument/2006/relationships">
+        <p:nvPicPr>
+          <p:cNvPr id="54" name="Picture 53" descr="loss_curve.png"/>
+          <p:cNvPicPr>
+            <a:picLocks noChangeAspect="1"/>
+          </p:cNvPicPr>
+          <p:nvPr/>
+        </p:nvPicPr>
+        <p:blipFill>
+          <a:blip r:embed="rId4"/>
+          <a:stretch>
+            <a:fillRect/>
+          </a:stretch>
+        </p:blipFill>
+        <p:spPr>
+          <a:xfrm>
+            <a:off x="822960" y="7498079"/>
+            <a:ext cx="3833677" cy="2286000"/>
+          </a:xfrm>
+          <a:prstGeom prst="rect">
+            <a:avLst/>
+          </a:prstGeom>
+        </p:spPr>
+      </p:pic>
+      <p:pic xmlns:a="http://schemas.openxmlformats.org/drawingml/2006/main" xmlns:r="http://schemas.openxmlformats.org/officeDocument/2006/relationships">
+        <p:nvPicPr>
+          <p:cNvPr id="53" name="Picture 52" descr="confusion_matrix.png"/>
+          <p:cNvPicPr>
+            <a:picLocks noChangeAspect="1"/>
+          </p:cNvPicPr>
+          <p:nvPr/>
+        </p:nvPicPr>
+        <p:blipFill>
+          <a:blip r:embed="rId3"/>
+          <a:stretch>
+            <a:fillRect/>
+          </a:stretch>
+        </p:blipFill>
+        <p:spPr>
+          <a:xfrm>
+            <a:off x="10972800" y="4114800"/>
+            <a:ext cx="3768777" cy="3200400"/>
+          </a:xfrm>
+          <a:prstGeom prst="rect">
+            <a:avLst/>
+          </a:prstGeom>
+        </p:spPr>
+      </p:pic>
       <p:nvGrpSpPr>
         <p:cNvPr id="1" name=""/>
         <p:cNvGrpSpPr/>
@@ -4313,7 +4387,7 @@
         </p:nvSpPr>
         <p:spPr>
           <a:xfrm xmlns:a="http://schemas.openxmlformats.org/drawingml/2006/main">
-            <a:off x="819150" y="3638550"/>
+            <a:off x="819150" y="1992630"/>
             <a:ext cx="6096000" cy="628650"/>
           </a:xfrm>
           <a:prstGeom xmlns:a="http://schemas.openxmlformats.org/drawingml/2006/main" prst="rect">
@@ -4358,7 +4432,7 @@
         </p:nvSpPr>
         <p:spPr>
           <a:xfrm xmlns:a="http://schemas.openxmlformats.org/drawingml/2006/main">
-            <a:off x="819150" y="4343400"/>
+            <a:off x="819150" y="2697480"/>
             <a:ext cx="6096000" cy="247650"/>
           </a:xfrm>
           <a:prstGeom xmlns:a="http://schemas.openxmlformats.org/drawingml/2006/main" prst="rect">
@@ -4403,7 +4477,7 @@
         </p:nvSpPr>
         <p:spPr>
           <a:xfrm xmlns:a="http://schemas.openxmlformats.org/drawingml/2006/main">
-            <a:off x="819150" y="4667250"/>
+            <a:off x="819150" y="3021330"/>
             <a:ext cx="6096000" cy="190500"/>
           </a:xfrm>
           <a:prstGeom xmlns:a="http://schemas.openxmlformats.org/drawingml/2006/main" prst="rect">
@@ -4448,7 +4522,7 @@
         </p:nvSpPr>
         <p:spPr>
           <a:xfrm xmlns:a="http://schemas.openxmlformats.org/drawingml/2006/main">
-            <a:off x="819150" y="5124450"/>
+            <a:off x="819150" y="3478530"/>
             <a:ext cx="6096000" cy="628650"/>
           </a:xfrm>
           <a:prstGeom xmlns:a="http://schemas.openxmlformats.org/drawingml/2006/main" prst="rect">
@@ -4493,7 +4567,7 @@
         </p:nvSpPr>
         <p:spPr>
           <a:xfrm xmlns:a="http://schemas.openxmlformats.org/drawingml/2006/main">
-            <a:off x="819150" y="5829300"/>
+            <a:off x="819150" y="4183380"/>
             <a:ext cx="6096000" cy="247650"/>
           </a:xfrm>
           <a:prstGeom xmlns:a="http://schemas.openxmlformats.org/drawingml/2006/main" prst="rect">
@@ -4538,7 +4612,7 @@
         </p:nvSpPr>
         <p:spPr>
           <a:xfrm xmlns:a="http://schemas.openxmlformats.org/drawingml/2006/main">
-            <a:off x="819150" y="6134100"/>
+            <a:off x="819150" y="4488180"/>
             <a:ext cx="6096000" cy="190500"/>
           </a:xfrm>
           <a:prstGeom xmlns:a="http://schemas.openxmlformats.org/drawingml/2006/main" prst="rect">
@@ -4583,7 +4657,7 @@
         </p:nvSpPr>
         <p:spPr>
           <a:xfrm xmlns:a="http://schemas.openxmlformats.org/drawingml/2006/main">
-            <a:off x="819150" y="6591300"/>
+            <a:off x="819150" y="4945380"/>
             <a:ext cx="6096000" cy="628650"/>
           </a:xfrm>
           <a:prstGeom xmlns:a="http://schemas.openxmlformats.org/drawingml/2006/main" prst="rect">
@@ -4628,7 +4702,7 @@
         </p:nvSpPr>
         <p:spPr>
           <a:xfrm xmlns:a="http://schemas.openxmlformats.org/drawingml/2006/main">
-            <a:off x="819150" y="7296150"/>
+            <a:off x="819150" y="5650230"/>
             <a:ext cx="6096000" cy="247650"/>
           </a:xfrm>
           <a:prstGeom xmlns:a="http://schemas.openxmlformats.org/drawingml/2006/main" prst="rect">
@@ -4673,7 +4747,7 @@
         </p:nvSpPr>
         <p:spPr>
           <a:xfrm xmlns:a="http://schemas.openxmlformats.org/drawingml/2006/main">
-            <a:off x="819150" y="7620000"/>
+            <a:off x="819150" y="5974080"/>
             <a:ext cx="6096000" cy="190500"/>
           </a:xfrm>
           <a:prstGeom xmlns:a="http://schemas.openxmlformats.org/drawingml/2006/main" prst="rect">
@@ -4736,6 +4810,10 @@
             <a:prstDash val="solid"/>
           </a:ln>
         </p:spPr>
+        <p:txBody xmlns:a="http://schemas.openxmlformats.org/drawingml/2006/main">
+          <a:bodyPr/>
+          <a:p/>
+        </p:txBody>
       </p:sp>
       <p:sp>
         <p:nvSpPr>
@@ -4753,7 +4831,7 @@
         </p:nvSpPr>
         <p:spPr>
           <a:xfrm xmlns:a="http://schemas.openxmlformats.org/drawingml/2006/main">
-            <a:off x="7448550" y="3048000"/>
+            <a:off x="7448550" y="1402080"/>
             <a:ext cx="1257300" cy="190500"/>
           </a:xfrm>
           <a:prstGeom xmlns:a="http://schemas.openxmlformats.org/drawingml/2006/main" prst="rect">
@@ -4816,6 +4894,10 @@
             <a:prstDash val="solid"/>
           </a:ln>
         </p:spPr>
+        <p:txBody xmlns:a="http://schemas.openxmlformats.org/drawingml/2006/main">
+          <a:bodyPr/>
+          <a:p/>
+        </p:txBody>
       </p:sp>
       <p:sp>
         <p:nvSpPr>
@@ -4833,7 +4915,7 @@
         </p:nvSpPr>
         <p:spPr>
           <a:xfrm xmlns:a="http://schemas.openxmlformats.org/drawingml/2006/main">
-            <a:off x="8972550" y="3048000"/>
+            <a:off x="8972550" y="1402080"/>
             <a:ext cx="1162050" cy="190500"/>
           </a:xfrm>
           <a:prstGeom xmlns:a="http://schemas.openxmlformats.org/drawingml/2006/main" prst="rect">
@@ -4896,6 +4978,10 @@
             <a:prstDash val="solid"/>
           </a:ln>
         </p:spPr>
+        <p:txBody xmlns:a="http://schemas.openxmlformats.org/drawingml/2006/main">
+          <a:bodyPr/>
+          <a:p/>
+        </p:txBody>
       </p:sp>
       <p:sp>
         <p:nvSpPr>
@@ -4913,7 +4999,7 @@
         </p:nvSpPr>
         <p:spPr>
           <a:xfrm xmlns:a="http://schemas.openxmlformats.org/drawingml/2006/main">
-            <a:off x="10401300" y="3048000"/>
+            <a:off x="10401300" y="1402080"/>
             <a:ext cx="1162050" cy="190500"/>
           </a:xfrm>
           <a:prstGeom xmlns:a="http://schemas.openxmlformats.org/drawingml/2006/main" prst="rect">
@@ -4976,6 +5062,10 @@
             <a:prstDash val="solid"/>
           </a:ln>
         </p:spPr>
+        <p:txBody xmlns:a="http://schemas.openxmlformats.org/drawingml/2006/main">
+          <a:bodyPr/>
+          <a:p/>
+        </p:txBody>
       </p:sp>
       <p:sp>
         <p:nvSpPr>
@@ -4993,7 +5083,7 @@
         </p:nvSpPr>
         <p:spPr>
           <a:xfrm xmlns:a="http://schemas.openxmlformats.org/drawingml/2006/main">
-            <a:off x="11830050" y="3048000"/>
+            <a:off x="11830050" y="1402080"/>
             <a:ext cx="1257300" cy="190500"/>
           </a:xfrm>
           <a:prstGeom xmlns:a="http://schemas.openxmlformats.org/drawingml/2006/main" prst="rect">
@@ -5056,6 +5146,10 @@
             <a:prstDash val="solid"/>
           </a:ln>
         </p:spPr>
+        <p:txBody xmlns:a="http://schemas.openxmlformats.org/drawingml/2006/main">
+          <a:bodyPr/>
+          <a:p/>
+        </p:txBody>
       </p:sp>
       <p:sp>
         <p:nvSpPr>
@@ -5073,7 +5167,7 @@
         </p:nvSpPr>
         <p:spPr>
           <a:xfrm xmlns:a="http://schemas.openxmlformats.org/drawingml/2006/main">
-            <a:off x="13354050" y="3048000"/>
+            <a:off x="13354050" y="1402080"/>
             <a:ext cx="971550" cy="190500"/>
           </a:xfrm>
           <a:prstGeom xmlns:a="http://schemas.openxmlformats.org/drawingml/2006/main" prst="rect">
@@ -5136,6 +5230,10 @@
             <a:prstDash val="solid"/>
           </a:ln>
         </p:spPr>
+        <p:txBody xmlns:a="http://schemas.openxmlformats.org/drawingml/2006/main">
+          <a:bodyPr/>
+          <a:p/>
+        </p:txBody>
       </p:sp>
       <p:sp>
         <p:nvSpPr>
@@ -5153,7 +5251,7 @@
         </p:nvSpPr>
         <p:spPr>
           <a:xfrm xmlns:a="http://schemas.openxmlformats.org/drawingml/2006/main">
-            <a:off x="7448550" y="3562350"/>
+            <a:off x="7448550" y="1916430"/>
             <a:ext cx="1257300" cy="190500"/>
           </a:xfrm>
           <a:prstGeom xmlns:a="http://schemas.openxmlformats.org/drawingml/2006/main" prst="rect">
@@ -5216,6 +5314,10 @@
             <a:prstDash val="solid"/>
           </a:ln>
         </p:spPr>
+        <p:txBody xmlns:a="http://schemas.openxmlformats.org/drawingml/2006/main">
+          <a:bodyPr/>
+          <a:p/>
+        </p:txBody>
       </p:sp>
       <p:sp>
         <p:nvSpPr>
@@ -5233,7 +5335,7 @@
         </p:nvSpPr>
         <p:spPr>
           <a:xfrm xmlns:a="http://schemas.openxmlformats.org/drawingml/2006/main">
-            <a:off x="8972550" y="3562350"/>
+            <a:off x="8972550" y="1916430"/>
             <a:ext cx="1162050" cy="190500"/>
           </a:xfrm>
           <a:prstGeom xmlns:a="http://schemas.openxmlformats.org/drawingml/2006/main" prst="rect">
@@ -5296,6 +5398,10 @@
             <a:prstDash val="solid"/>
           </a:ln>
         </p:spPr>
+        <p:txBody xmlns:a="http://schemas.openxmlformats.org/drawingml/2006/main">
+          <a:bodyPr/>
+          <a:p/>
+        </p:txBody>
       </p:sp>
       <p:sp>
         <p:nvSpPr>
@@ -5313,7 +5419,7 @@
         </p:nvSpPr>
         <p:spPr>
           <a:xfrm xmlns:a="http://schemas.openxmlformats.org/drawingml/2006/main">
-            <a:off x="10401300" y="3562350"/>
+            <a:off x="10401300" y="1916430"/>
             <a:ext cx="1162050" cy="190500"/>
           </a:xfrm>
           <a:prstGeom xmlns:a="http://schemas.openxmlformats.org/drawingml/2006/main" prst="rect">
@@ -5376,6 +5482,10 @@
             <a:prstDash val="solid"/>
           </a:ln>
         </p:spPr>
+        <p:txBody xmlns:a="http://schemas.openxmlformats.org/drawingml/2006/main">
+          <a:bodyPr/>
+          <a:p/>
+        </p:txBody>
       </p:sp>
       <p:sp>
         <p:nvSpPr>
@@ -5393,7 +5503,7 @@
         </p:nvSpPr>
         <p:spPr>
           <a:xfrm xmlns:a="http://schemas.openxmlformats.org/drawingml/2006/main">
-            <a:off x="11830050" y="3562350"/>
+            <a:off x="11830050" y="1916430"/>
             <a:ext cx="1257300" cy="190500"/>
           </a:xfrm>
           <a:prstGeom xmlns:a="http://schemas.openxmlformats.org/drawingml/2006/main" prst="rect">
@@ -5456,6 +5566,10 @@
             <a:prstDash val="solid"/>
           </a:ln>
         </p:spPr>
+        <p:txBody xmlns:a="http://schemas.openxmlformats.org/drawingml/2006/main">
+          <a:bodyPr/>
+          <a:p/>
+        </p:txBody>
       </p:sp>
       <p:sp>
         <p:nvSpPr>
@@ -5473,7 +5587,7 @@
         </p:nvSpPr>
         <p:spPr>
           <a:xfrm xmlns:a="http://schemas.openxmlformats.org/drawingml/2006/main">
-            <a:off x="13354050" y="3562350"/>
+            <a:off x="13354050" y="1916430"/>
             <a:ext cx="971550" cy="190500"/>
           </a:xfrm>
           <a:prstGeom xmlns:a="http://schemas.openxmlformats.org/drawingml/2006/main" prst="rect">
@@ -5536,6 +5650,10 @@
             <a:prstDash val="solid"/>
           </a:ln>
         </p:spPr>
+        <p:txBody xmlns:a="http://schemas.openxmlformats.org/drawingml/2006/main">
+          <a:bodyPr/>
+          <a:p/>
+        </p:txBody>
       </p:sp>
       <p:sp>
         <p:nvSpPr>
@@ -5553,7 +5671,7 @@
         </p:nvSpPr>
         <p:spPr>
           <a:xfrm xmlns:a="http://schemas.openxmlformats.org/drawingml/2006/main">
-            <a:off x="7448550" y="4038600"/>
+            <a:off x="7448550" y="2392680"/>
             <a:ext cx="1257300" cy="190500"/>
           </a:xfrm>
           <a:prstGeom xmlns:a="http://schemas.openxmlformats.org/drawingml/2006/main" prst="rect">
@@ -5616,6 +5734,10 @@
             <a:prstDash val="solid"/>
           </a:ln>
         </p:spPr>
+        <p:txBody xmlns:a="http://schemas.openxmlformats.org/drawingml/2006/main">
+          <a:bodyPr/>
+          <a:p/>
+        </p:txBody>
       </p:sp>
       <p:sp>
         <p:nvSpPr>
@@ -5633,7 +5755,7 @@
         </p:nvSpPr>
         <p:spPr>
           <a:xfrm xmlns:a="http://schemas.openxmlformats.org/drawingml/2006/main">
-            <a:off x="8972550" y="4038600"/>
+            <a:off x="8972550" y="2392680"/>
             <a:ext cx="1162050" cy="190500"/>
           </a:xfrm>
           <a:prstGeom xmlns:a="http://schemas.openxmlformats.org/drawingml/2006/main" prst="rect">
@@ -5696,6 +5818,10 @@
             <a:prstDash val="solid"/>
           </a:ln>
         </p:spPr>
+        <p:txBody xmlns:a="http://schemas.openxmlformats.org/drawingml/2006/main">
+          <a:bodyPr/>
+          <a:p/>
+        </p:txBody>
       </p:sp>
       <p:sp>
         <p:nvSpPr>
@@ -5713,7 +5839,7 @@
         </p:nvSpPr>
         <p:spPr>
           <a:xfrm xmlns:a="http://schemas.openxmlformats.org/drawingml/2006/main">
-            <a:off x="10401300" y="4038600"/>
+            <a:off x="10401300" y="2392680"/>
             <a:ext cx="1162050" cy="190500"/>
           </a:xfrm>
           <a:prstGeom xmlns:a="http://schemas.openxmlformats.org/drawingml/2006/main" prst="rect">
@@ -5776,6 +5902,10 @@
             <a:prstDash val="solid"/>
           </a:ln>
         </p:spPr>
+        <p:txBody xmlns:a="http://schemas.openxmlformats.org/drawingml/2006/main">
+          <a:bodyPr/>
+          <a:p/>
+        </p:txBody>
       </p:sp>
       <p:sp>
         <p:nvSpPr>
@@ -5793,7 +5923,7 @@
         </p:nvSpPr>
         <p:spPr>
           <a:xfrm xmlns:a="http://schemas.openxmlformats.org/drawingml/2006/main">
-            <a:off x="11830050" y="4038600"/>
+            <a:off x="11830050" y="2392680"/>
             <a:ext cx="1257300" cy="190500"/>
           </a:xfrm>
           <a:prstGeom xmlns:a="http://schemas.openxmlformats.org/drawingml/2006/main" prst="rect">
@@ -5856,6 +5986,10 @@
             <a:prstDash val="solid"/>
           </a:ln>
         </p:spPr>
+        <p:txBody xmlns:a="http://schemas.openxmlformats.org/drawingml/2006/main">
+          <a:bodyPr/>
+          <a:p/>
+        </p:txBody>
       </p:sp>
       <p:sp>
         <p:nvSpPr>
@@ -5873,7 +6007,7 @@
         </p:nvSpPr>
         <p:spPr>
           <a:xfrm xmlns:a="http://schemas.openxmlformats.org/drawingml/2006/main">
-            <a:off x="13354050" y="4038600"/>
+            <a:off x="13354050" y="2392680"/>
             <a:ext cx="971550" cy="190500"/>
           </a:xfrm>
           <a:prstGeom xmlns:a="http://schemas.openxmlformats.org/drawingml/2006/main" prst="rect">
@@ -5936,6 +6070,10 @@
             <a:prstDash val="solid"/>
           </a:ln>
         </p:spPr>
+        <p:txBody xmlns:a="http://schemas.openxmlformats.org/drawingml/2006/main">
+          <a:bodyPr/>
+          <a:p/>
+        </p:txBody>
       </p:sp>
       <p:sp>
         <p:nvSpPr>
@@ -5953,7 +6091,7 @@
         </p:nvSpPr>
         <p:spPr>
           <a:xfrm xmlns:a="http://schemas.openxmlformats.org/drawingml/2006/main">
-            <a:off x="7448550" y="4514850"/>
+            <a:off x="7448550" y="2868930"/>
             <a:ext cx="1257300" cy="190500"/>
           </a:xfrm>
           <a:prstGeom xmlns:a="http://schemas.openxmlformats.org/drawingml/2006/main" prst="rect">
@@ -6016,6 +6154,10 @@
             <a:prstDash val="solid"/>
           </a:ln>
         </p:spPr>
+        <p:txBody xmlns:a="http://schemas.openxmlformats.org/drawingml/2006/main">
+          <a:bodyPr/>
+          <a:p/>
+        </p:txBody>
       </p:sp>
       <p:sp>
         <p:nvSpPr>
@@ -6033,7 +6175,7 @@
         </p:nvSpPr>
         <p:spPr>
           <a:xfrm xmlns:a="http://schemas.openxmlformats.org/drawingml/2006/main">
-            <a:off x="8972550" y="4514850"/>
+            <a:off x="8972550" y="2868930"/>
             <a:ext cx="1162050" cy="190500"/>
           </a:xfrm>
           <a:prstGeom xmlns:a="http://schemas.openxmlformats.org/drawingml/2006/main" prst="rect">
@@ -6096,6 +6238,10 @@
             <a:prstDash val="solid"/>
           </a:ln>
         </p:spPr>
+        <p:txBody xmlns:a="http://schemas.openxmlformats.org/drawingml/2006/main">
+          <a:bodyPr/>
+          <a:p/>
+        </p:txBody>
       </p:sp>
       <p:sp>
         <p:nvSpPr>
@@ -6113,7 +6259,7 @@
         </p:nvSpPr>
         <p:spPr>
           <a:xfrm xmlns:a="http://schemas.openxmlformats.org/drawingml/2006/main">
-            <a:off x="10401300" y="4514850"/>
+            <a:off x="10401300" y="2868930"/>
             <a:ext cx="1162050" cy="190500"/>
           </a:xfrm>
           <a:prstGeom xmlns:a="http://schemas.openxmlformats.org/drawingml/2006/main" prst="rect">
@@ -6176,6 +6322,10 @@
             <a:prstDash val="solid"/>
           </a:ln>
         </p:spPr>
+        <p:txBody xmlns:a="http://schemas.openxmlformats.org/drawingml/2006/main">
+          <a:bodyPr/>
+          <a:p/>
+        </p:txBody>
       </p:sp>
       <p:sp>
         <p:nvSpPr>
@@ -6193,7 +6343,7 @@
         </p:nvSpPr>
         <p:spPr>
           <a:xfrm xmlns:a="http://schemas.openxmlformats.org/drawingml/2006/main">
-            <a:off x="11830050" y="4514850"/>
+            <a:off x="11830050" y="2868930"/>
             <a:ext cx="1257300" cy="190500"/>
           </a:xfrm>
           <a:prstGeom xmlns:a="http://schemas.openxmlformats.org/drawingml/2006/main" prst="rect">
@@ -6256,6 +6406,10 @@
             <a:prstDash val="solid"/>
           </a:ln>
         </p:spPr>
+        <p:txBody xmlns:a="http://schemas.openxmlformats.org/drawingml/2006/main">
+          <a:bodyPr/>
+          <a:p/>
+        </p:txBody>
       </p:sp>
       <p:sp>
         <p:nvSpPr>
@@ -6273,7 +6427,7 @@
         </p:nvSpPr>
         <p:spPr>
           <a:xfrm xmlns:a="http://schemas.openxmlformats.org/drawingml/2006/main">
-            <a:off x="13354050" y="4514850"/>
+            <a:off x="13354050" y="2868930"/>
             <a:ext cx="971550" cy="190500"/>
           </a:xfrm>
           <a:prstGeom xmlns:a="http://schemas.openxmlformats.org/drawingml/2006/main" prst="rect">
@@ -6298,506 +6452,6 @@
                 </a:solidFill>
               </a:rPr>
               <a:t>-</a:t>
-            </a:r>
-          </a:p>
-        </p:txBody>
-      </p:sp>
-      <p:sp>
-        <p:nvSpPr>
-          <p:cNvPr id="53" name="">
-            <a:extLst xmlns:a="http://schemas.openxmlformats.org/drawingml/2006/main">
-              <a:ext uri="{FF2B5EF4-FFF2-40B4-BE49-F238E27FC236}">
-                <a16:creationId xmlns:a16="http://schemas.microsoft.com/office/drawing/2014/main" id="{D69E97FD-B181-4C18-B6C5-D65625595990}"/>
-              </a:ext>
-            </a:extLst>
-          </p:cNvPr>
-          <p:cNvSpPr>
-            <a:spLocks xmlns:a="http://schemas.openxmlformats.org/drawingml/2006/main" noGrp="1"/>
-          </p:cNvSpPr>
-          <p:nvPr/>
-        </p:nvSpPr>
-        <p:spPr>
-          <a:xfrm xmlns:a="http://schemas.openxmlformats.org/drawingml/2006/main">
-            <a:off x="7312819" y="5086350"/>
-            <a:ext cx="2539008" cy="3429000"/>
-          </a:xfrm>
-          <a:prstGeom xmlns:a="http://schemas.openxmlformats.org/drawingml/2006/main" prst="roundRect">
-            <a:avLst>
-              <a:gd name="adj" fmla="val 2251"/>
-            </a:avLst>
-          </a:prstGeom>
-          <a:solidFill xmlns:a="http://schemas.openxmlformats.org/drawingml/2006/main">
-            <a:srgbClr val="124D77"/>
-          </a:solidFill>
-          <a:ln xmlns:a="http://schemas.openxmlformats.org/drawingml/2006/main" w="9525">
-            <a:solidFill>
-              <a:srgbClr val="124D77"/>
-            </a:solidFill>
-            <a:prstDash val="solid"/>
-          </a:ln>
-        </p:spPr>
-      </p:sp>
-      <p:sp>
-        <p:nvSpPr>
-          <p:cNvPr id="54" name="">
-            <a:extLst xmlns:a="http://schemas.openxmlformats.org/drawingml/2006/main">
-              <a:ext uri="{FF2B5EF4-FFF2-40B4-BE49-F238E27FC236}">
-                <a16:creationId xmlns:a16="http://schemas.microsoft.com/office/drawing/2014/main" id="{1F8F1385-F788-4AE9-9E47-4B193BD65821}"/>
-              </a:ext>
-            </a:extLst>
-          </p:cNvPr>
-          <p:cNvSpPr>
-            <a:spLocks xmlns:a="http://schemas.openxmlformats.org/drawingml/2006/main" noGrp="1"/>
-          </p:cNvSpPr>
-          <p:nvPr/>
-        </p:nvSpPr>
-        <p:spPr>
-          <a:xfrm xmlns:a="http://schemas.openxmlformats.org/drawingml/2006/main">
-            <a:off x="7581900" y="6438900"/>
-            <a:ext cx="2000250" cy="438150"/>
-          </a:xfrm>
-          <a:prstGeom xmlns:a="http://schemas.openxmlformats.org/drawingml/2006/main" prst="rect">
-            <a:avLst/>
-          </a:prstGeom>
-        </p:spPr>
-        <p:txBody>
-          <a:bodyPr xmlns:a="http://schemas.openxmlformats.org/drawingml/2006/main" lIns="0" tIns="0" rIns="0" bIns="0"/>
-          <a:lstStyle xmlns:a="http://schemas.openxmlformats.org/drawingml/2006/main"/>
-          <a:p xmlns:a="http://schemas.openxmlformats.org/drawingml/2006/main">
-            <a:pPr>
-              <a:defRPr sz="3450" b="1">
-                <a:solidFill>
-                  <a:srgbClr val="FFFFFF"/>
-                </a:solidFill>
-              </a:defRPr>
-            </a:pPr>
-            <a:r>
-              <a:rPr sz="3450" b="1">
-                <a:solidFill>
-                  <a:srgbClr val="FFFFFF"/>
-                </a:solidFill>
-              </a:rPr>
-              <a:t>7973</a:t>
-            </a:r>
-          </a:p>
-        </p:txBody>
-      </p:sp>
-      <p:sp>
-        <p:nvSpPr>
-          <p:cNvPr id="55" name="">
-            <a:extLst xmlns:a="http://schemas.openxmlformats.org/drawingml/2006/main">
-              <a:ext uri="{FF2B5EF4-FFF2-40B4-BE49-F238E27FC236}">
-                <a16:creationId xmlns:a16="http://schemas.microsoft.com/office/drawing/2014/main" id="{6CF7DB45-864D-4AD0-A8B4-0BC0B8F82F0D}"/>
-              </a:ext>
-            </a:extLst>
-          </p:cNvPr>
-          <p:cNvSpPr>
-            <a:spLocks xmlns:a="http://schemas.openxmlformats.org/drawingml/2006/main" noGrp="1"/>
-          </p:cNvSpPr>
-          <p:nvPr/>
-        </p:nvSpPr>
-        <p:spPr>
-          <a:xfrm xmlns:a="http://schemas.openxmlformats.org/drawingml/2006/main">
-            <a:off x="7581900" y="6953250"/>
-            <a:ext cx="2000250" cy="209550"/>
-          </a:xfrm>
-          <a:prstGeom xmlns:a="http://schemas.openxmlformats.org/drawingml/2006/main" prst="rect">
-            <a:avLst/>
-          </a:prstGeom>
-        </p:spPr>
-        <p:txBody>
-          <a:bodyPr xmlns:a="http://schemas.openxmlformats.org/drawingml/2006/main" lIns="0" tIns="0" rIns="0" bIns="0"/>
-          <a:lstStyle xmlns:a="http://schemas.openxmlformats.org/drawingml/2006/main"/>
-          <a:p xmlns:a="http://schemas.openxmlformats.org/drawingml/2006/main">
-            <a:pPr>
-              <a:defRPr sz="1650">
-                <a:solidFill>
-                  <a:srgbClr val="D5EAF2"/>
-                </a:solidFill>
-              </a:defRPr>
-            </a:pPr>
-            <a:r>
-              <a:rPr sz="1650">
-                <a:solidFill>
-                  <a:srgbClr val="D5EAF2"/>
-                </a:solidFill>
-              </a:rPr>
-              <a:t>TN</a:t>
-            </a:r>
-          </a:p>
-        </p:txBody>
-      </p:sp>
-      <p:sp>
-        <p:nvSpPr>
-          <p:cNvPr id="56" name="">
-            <a:extLst xmlns:a="http://schemas.openxmlformats.org/drawingml/2006/main">
-              <a:ext uri="{FF2B5EF4-FFF2-40B4-BE49-F238E27FC236}">
-                <a16:creationId xmlns:a16="http://schemas.microsoft.com/office/drawing/2014/main" id="{FB8C6B17-023F-48F5-B69E-4775452F4735}"/>
-              </a:ext>
-            </a:extLst>
-          </p:cNvPr>
-          <p:cNvSpPr>
-            <a:spLocks xmlns:a="http://schemas.openxmlformats.org/drawingml/2006/main" noGrp="1"/>
-          </p:cNvSpPr>
-          <p:nvPr/>
-        </p:nvSpPr>
-        <p:spPr>
-          <a:xfrm xmlns:a="http://schemas.openxmlformats.org/drawingml/2006/main">
-            <a:off x="9851827" y="5086350"/>
-            <a:ext cx="2539008" cy="3429000"/>
-          </a:xfrm>
-          <a:prstGeom xmlns:a="http://schemas.openxmlformats.org/drawingml/2006/main" prst="roundRect">
-            <a:avLst>
-              <a:gd name="adj" fmla="val 2251"/>
-            </a:avLst>
-          </a:prstGeom>
-          <a:solidFill xmlns:a="http://schemas.openxmlformats.org/drawingml/2006/main">
-            <a:srgbClr val="D7EAF2"/>
-          </a:solidFill>
-          <a:ln xmlns:a="http://schemas.openxmlformats.org/drawingml/2006/main" w="9525">
-            <a:solidFill>
-              <a:srgbClr val="D7EAF2"/>
-            </a:solidFill>
-            <a:prstDash val="solid"/>
-          </a:ln>
-        </p:spPr>
-      </p:sp>
-      <p:sp>
-        <p:nvSpPr>
-          <p:cNvPr id="57" name="">
-            <a:extLst xmlns:a="http://schemas.openxmlformats.org/drawingml/2006/main">
-              <a:ext uri="{FF2B5EF4-FFF2-40B4-BE49-F238E27FC236}">
-                <a16:creationId xmlns:a16="http://schemas.microsoft.com/office/drawing/2014/main" id="{3E5130BC-A16E-4B7A-9B00-51E44D584310}"/>
-              </a:ext>
-            </a:extLst>
-          </p:cNvPr>
-          <p:cNvSpPr>
-            <a:spLocks xmlns:a="http://schemas.openxmlformats.org/drawingml/2006/main" noGrp="1"/>
-          </p:cNvSpPr>
-          <p:nvPr/>
-        </p:nvSpPr>
-        <p:spPr>
-          <a:xfrm xmlns:a="http://schemas.openxmlformats.org/drawingml/2006/main">
-            <a:off x="10115550" y="6438900"/>
-            <a:ext cx="2000250" cy="438150"/>
-          </a:xfrm>
-          <a:prstGeom xmlns:a="http://schemas.openxmlformats.org/drawingml/2006/main" prst="rect">
-            <a:avLst/>
-          </a:prstGeom>
-        </p:spPr>
-        <p:txBody>
-          <a:bodyPr xmlns:a="http://schemas.openxmlformats.org/drawingml/2006/main" lIns="0" tIns="0" rIns="0" bIns="0"/>
-          <a:lstStyle xmlns:a="http://schemas.openxmlformats.org/drawingml/2006/main"/>
-          <a:p xmlns:a="http://schemas.openxmlformats.org/drawingml/2006/main">
-            <a:pPr>
-              <a:defRPr sz="3450" b="1">
-                <a:solidFill>
-                  <a:srgbClr val="111827"/>
-                </a:solidFill>
-              </a:defRPr>
-            </a:pPr>
-            <a:r>
-              <a:rPr sz="3450" b="1">
-                <a:solidFill>
-                  <a:srgbClr val="111827"/>
-                </a:solidFill>
-              </a:rPr>
-              <a:t>619</a:t>
-            </a:r>
-          </a:p>
-        </p:txBody>
-      </p:sp>
-      <p:sp>
-        <p:nvSpPr>
-          <p:cNvPr id="58" name="">
-            <a:extLst xmlns:a="http://schemas.openxmlformats.org/drawingml/2006/main">
-              <a:ext uri="{FF2B5EF4-FFF2-40B4-BE49-F238E27FC236}">
-                <a16:creationId xmlns:a16="http://schemas.microsoft.com/office/drawing/2014/main" id="{B2486E88-93EB-4F5A-873C-39878E71DBA7}"/>
-              </a:ext>
-            </a:extLst>
-          </p:cNvPr>
-          <p:cNvSpPr>
-            <a:spLocks xmlns:a="http://schemas.openxmlformats.org/drawingml/2006/main" noGrp="1"/>
-          </p:cNvSpPr>
-          <p:nvPr/>
-        </p:nvSpPr>
-        <p:spPr>
-          <a:xfrm xmlns:a="http://schemas.openxmlformats.org/drawingml/2006/main">
-            <a:off x="10115550" y="6953250"/>
-            <a:ext cx="2000250" cy="209550"/>
-          </a:xfrm>
-          <a:prstGeom xmlns:a="http://schemas.openxmlformats.org/drawingml/2006/main" prst="rect">
-            <a:avLst/>
-          </a:prstGeom>
-        </p:spPr>
-        <p:txBody>
-          <a:bodyPr xmlns:a="http://schemas.openxmlformats.org/drawingml/2006/main" lIns="0" tIns="0" rIns="0" bIns="0"/>
-          <a:lstStyle xmlns:a="http://schemas.openxmlformats.org/drawingml/2006/main"/>
-          <a:p xmlns:a="http://schemas.openxmlformats.org/drawingml/2006/main">
-            <a:pPr>
-              <a:defRPr sz="1650">
-                <a:solidFill>
-                  <a:srgbClr val="596A80"/>
-                </a:solidFill>
-              </a:defRPr>
-            </a:pPr>
-            <a:r>
-              <a:rPr sz="1650">
-                <a:solidFill>
-                  <a:srgbClr val="596A80"/>
-                </a:solidFill>
-              </a:rPr>
-              <a:t>FP</a:t>
-            </a:r>
-          </a:p>
-        </p:txBody>
-      </p:sp>
-      <p:sp>
-        <p:nvSpPr>
-          <p:cNvPr id="59" name="">
-            <a:extLst xmlns:a="http://schemas.openxmlformats.org/drawingml/2006/main">
-              <a:ext uri="{FF2B5EF4-FFF2-40B4-BE49-F238E27FC236}">
-                <a16:creationId xmlns:a16="http://schemas.microsoft.com/office/drawing/2014/main" id="{5DDA1917-CDFD-42EF-B0C2-4F55DEBEC53F}"/>
-              </a:ext>
-            </a:extLst>
-          </p:cNvPr>
-          <p:cNvSpPr>
-            <a:spLocks xmlns:a="http://schemas.openxmlformats.org/drawingml/2006/main" noGrp="1"/>
-          </p:cNvSpPr>
-          <p:nvPr/>
-        </p:nvSpPr>
-        <p:spPr>
-          <a:xfrm xmlns:a="http://schemas.openxmlformats.org/drawingml/2006/main">
-            <a:off x="12390834" y="5086350"/>
-            <a:ext cx="2539008" cy="3429000"/>
-          </a:xfrm>
-          <a:prstGeom xmlns:a="http://schemas.openxmlformats.org/drawingml/2006/main" prst="roundRect">
-            <a:avLst>
-              <a:gd name="adj" fmla="val 2251"/>
-            </a:avLst>
-          </a:prstGeom>
-          <a:solidFill xmlns:a="http://schemas.openxmlformats.org/drawingml/2006/main">
-            <a:srgbClr val="E9F2F7"/>
-          </a:solidFill>
-          <a:ln xmlns:a="http://schemas.openxmlformats.org/drawingml/2006/main" w="9525">
-            <a:solidFill>
-              <a:srgbClr val="E9F2F7"/>
-            </a:solidFill>
-            <a:prstDash val="solid"/>
-          </a:ln>
-        </p:spPr>
-      </p:sp>
-      <p:sp>
-        <p:nvSpPr>
-          <p:cNvPr id="60" name="">
-            <a:extLst xmlns:a="http://schemas.openxmlformats.org/drawingml/2006/main">
-              <a:ext uri="{FF2B5EF4-FFF2-40B4-BE49-F238E27FC236}">
-                <a16:creationId xmlns:a16="http://schemas.microsoft.com/office/drawing/2014/main" id="{AA1CC9A3-8BFE-487B-84FE-47E9EFA5F728}"/>
-              </a:ext>
-            </a:extLst>
-          </p:cNvPr>
-          <p:cNvSpPr>
-            <a:spLocks xmlns:a="http://schemas.openxmlformats.org/drawingml/2006/main" noGrp="1"/>
-          </p:cNvSpPr>
-          <p:nvPr/>
-        </p:nvSpPr>
-        <p:spPr>
-          <a:xfrm xmlns:a="http://schemas.openxmlformats.org/drawingml/2006/main">
-            <a:off x="12649200" y="6438900"/>
-            <a:ext cx="2000250" cy="438150"/>
-          </a:xfrm>
-          <a:prstGeom xmlns:a="http://schemas.openxmlformats.org/drawingml/2006/main" prst="rect">
-            <a:avLst/>
-          </a:prstGeom>
-        </p:spPr>
-        <p:txBody>
-          <a:bodyPr xmlns:a="http://schemas.openxmlformats.org/drawingml/2006/main" lIns="0" tIns="0" rIns="0" bIns="0"/>
-          <a:lstStyle xmlns:a="http://schemas.openxmlformats.org/drawingml/2006/main"/>
-          <a:p xmlns:a="http://schemas.openxmlformats.org/drawingml/2006/main">
-            <a:pPr>
-              <a:defRPr sz="3450" b="1">
-                <a:solidFill>
-                  <a:srgbClr val="111827"/>
-                </a:solidFill>
-              </a:defRPr>
-            </a:pPr>
-            <a:r>
-              <a:rPr sz="3450" b="1">
-                <a:solidFill>
-                  <a:srgbClr val="111827"/>
-                </a:solidFill>
-              </a:rPr>
-              <a:t>333</a:t>
-            </a:r>
-          </a:p>
-        </p:txBody>
-      </p:sp>
-      <p:sp>
-        <p:nvSpPr>
-          <p:cNvPr id="61" name="">
-            <a:extLst xmlns:a="http://schemas.openxmlformats.org/drawingml/2006/main">
-              <a:ext uri="{FF2B5EF4-FFF2-40B4-BE49-F238E27FC236}">
-                <a16:creationId xmlns:a16="http://schemas.microsoft.com/office/drawing/2014/main" id="{8C16E12E-2DED-41C1-8F9F-F78F4FCD70D6}"/>
-              </a:ext>
-            </a:extLst>
-          </p:cNvPr>
-          <p:cNvSpPr>
-            <a:spLocks xmlns:a="http://schemas.openxmlformats.org/drawingml/2006/main" noGrp="1"/>
-          </p:cNvSpPr>
-          <p:nvPr/>
-        </p:nvSpPr>
-        <p:spPr>
-          <a:xfrm xmlns:a="http://schemas.openxmlformats.org/drawingml/2006/main">
-            <a:off x="12649200" y="6953250"/>
-            <a:ext cx="2000250" cy="209550"/>
-          </a:xfrm>
-          <a:prstGeom xmlns:a="http://schemas.openxmlformats.org/drawingml/2006/main" prst="rect">
-            <a:avLst/>
-          </a:prstGeom>
-        </p:spPr>
-        <p:txBody>
-          <a:bodyPr xmlns:a="http://schemas.openxmlformats.org/drawingml/2006/main" lIns="0" tIns="0" rIns="0" bIns="0"/>
-          <a:lstStyle xmlns:a="http://schemas.openxmlformats.org/drawingml/2006/main"/>
-          <a:p xmlns:a="http://schemas.openxmlformats.org/drawingml/2006/main">
-            <a:pPr>
-              <a:defRPr sz="1650">
-                <a:solidFill>
-                  <a:srgbClr val="596A80"/>
-                </a:solidFill>
-              </a:defRPr>
-            </a:pPr>
-            <a:r>
-              <a:rPr sz="1650">
-                <a:solidFill>
-                  <a:srgbClr val="596A80"/>
-                </a:solidFill>
-              </a:rPr>
-              <a:t>FN</a:t>
-            </a:r>
-          </a:p>
-        </p:txBody>
-      </p:sp>
-      <p:sp>
-        <p:nvSpPr>
-          <p:cNvPr id="62" name="">
-            <a:extLst xmlns:a="http://schemas.openxmlformats.org/drawingml/2006/main">
-              <a:ext uri="{FF2B5EF4-FFF2-40B4-BE49-F238E27FC236}">
-                <a16:creationId xmlns:a16="http://schemas.microsoft.com/office/drawing/2014/main" id="{3C40FD3D-D735-4702-AC49-B603875B0610}"/>
-              </a:ext>
-            </a:extLst>
-          </p:cNvPr>
-          <p:cNvSpPr>
-            <a:spLocks xmlns:a="http://schemas.openxmlformats.org/drawingml/2006/main" noGrp="1"/>
-          </p:cNvSpPr>
-          <p:nvPr/>
-        </p:nvSpPr>
-        <p:spPr>
-          <a:xfrm xmlns:a="http://schemas.openxmlformats.org/drawingml/2006/main">
-            <a:off x="14929842" y="5086350"/>
-            <a:ext cx="2539008" cy="3429000"/>
-          </a:xfrm>
-          <a:prstGeom xmlns:a="http://schemas.openxmlformats.org/drawingml/2006/main" prst="roundRect">
-            <a:avLst>
-              <a:gd name="adj" fmla="val 2251"/>
-            </a:avLst>
-          </a:prstGeom>
-          <a:solidFill xmlns:a="http://schemas.openxmlformats.org/drawingml/2006/main">
-            <a:srgbClr val="73A9C7"/>
-          </a:solidFill>
-          <a:ln xmlns:a="http://schemas.openxmlformats.org/drawingml/2006/main" w="9525">
-            <a:solidFill>
-              <a:srgbClr val="73A9C7"/>
-            </a:solidFill>
-            <a:prstDash val="solid"/>
-          </a:ln>
-        </p:spPr>
-      </p:sp>
-      <p:sp>
-        <p:nvSpPr>
-          <p:cNvPr id="63" name="">
-            <a:extLst xmlns:a="http://schemas.openxmlformats.org/drawingml/2006/main">
-              <a:ext uri="{FF2B5EF4-FFF2-40B4-BE49-F238E27FC236}">
-                <a16:creationId xmlns:a16="http://schemas.microsoft.com/office/drawing/2014/main" id="{2768FB23-FB4A-4B8D-8564-A1C43DBE0393}"/>
-              </a:ext>
-            </a:extLst>
-          </p:cNvPr>
-          <p:cNvSpPr>
-            <a:spLocks xmlns:a="http://schemas.openxmlformats.org/drawingml/2006/main" noGrp="1"/>
-          </p:cNvSpPr>
-          <p:nvPr/>
-        </p:nvSpPr>
-        <p:spPr>
-          <a:xfrm xmlns:a="http://schemas.openxmlformats.org/drawingml/2006/main">
-            <a:off x="15201900" y="6438900"/>
-            <a:ext cx="2000250" cy="438150"/>
-          </a:xfrm>
-          <a:prstGeom xmlns:a="http://schemas.openxmlformats.org/drawingml/2006/main" prst="rect">
-            <a:avLst/>
-          </a:prstGeom>
-        </p:spPr>
-        <p:txBody>
-          <a:bodyPr xmlns:a="http://schemas.openxmlformats.org/drawingml/2006/main" lIns="0" tIns="0" rIns="0" bIns="0"/>
-          <a:lstStyle xmlns:a="http://schemas.openxmlformats.org/drawingml/2006/main"/>
-          <a:p xmlns:a="http://schemas.openxmlformats.org/drawingml/2006/main">
-            <a:pPr>
-              <a:defRPr sz="3450" b="1">
-                <a:solidFill>
-                  <a:srgbClr val="FFFFFF"/>
-                </a:solidFill>
-              </a:defRPr>
-            </a:pPr>
-            <a:r>
-              <a:rPr sz="3450" b="1">
-                <a:solidFill>
-                  <a:srgbClr val="FFFFFF"/>
-                </a:solidFill>
-              </a:rPr>
-              <a:t>1632</a:t>
-            </a:r>
-          </a:p>
-        </p:txBody>
-      </p:sp>
-      <p:sp>
-        <p:nvSpPr>
-          <p:cNvPr id="64" name="">
-            <a:extLst xmlns:a="http://schemas.openxmlformats.org/drawingml/2006/main">
-              <a:ext uri="{FF2B5EF4-FFF2-40B4-BE49-F238E27FC236}">
-                <a16:creationId xmlns:a16="http://schemas.microsoft.com/office/drawing/2014/main" id="{A0FCEBC2-6BA2-4F2C-B604-0683167C22C4}"/>
-              </a:ext>
-            </a:extLst>
-          </p:cNvPr>
-          <p:cNvSpPr>
-            <a:spLocks xmlns:a="http://schemas.openxmlformats.org/drawingml/2006/main" noGrp="1"/>
-          </p:cNvSpPr>
-          <p:nvPr/>
-        </p:nvSpPr>
-        <p:spPr>
-          <a:xfrm xmlns:a="http://schemas.openxmlformats.org/drawingml/2006/main">
-            <a:off x="15201900" y="6953250"/>
-            <a:ext cx="2000250" cy="209550"/>
-          </a:xfrm>
-          <a:prstGeom xmlns:a="http://schemas.openxmlformats.org/drawingml/2006/main" prst="rect">
-            <a:avLst/>
-          </a:prstGeom>
-        </p:spPr>
-        <p:txBody>
-          <a:bodyPr xmlns:a="http://schemas.openxmlformats.org/drawingml/2006/main" lIns="0" tIns="0" rIns="0" bIns="0"/>
-          <a:lstStyle xmlns:a="http://schemas.openxmlformats.org/drawingml/2006/main"/>
-          <a:p xmlns:a="http://schemas.openxmlformats.org/drawingml/2006/main">
-            <a:pPr>
-              <a:defRPr sz="1650">
-                <a:solidFill>
-                  <a:srgbClr val="EDF7FB"/>
-                </a:solidFill>
-              </a:defRPr>
-            </a:pPr>
-            <a:r>
-              <a:rPr sz="1650">
-                <a:solidFill>
-                  <a:srgbClr val="EDF7FB"/>
-                </a:solidFill>
-              </a:rPr>
-              <a:t>TP</a:t>
             </a:r>
           </a:p>
         </p:txBody>
@@ -7427,6 +7081,120 @@
                 </a:solidFill>
               </a:rPr>
               <a:t>AUC 0.9588 | F1 0.7583 | Accuracy 0.9018 | Recall 0.8282</a:t>
+            </a:r>
+          </a:p>
+        </p:txBody>
+      </p:sp>
+      <p:sp xmlns:a="http://schemas.openxmlformats.org/drawingml/2006/main">
+        <p:nvSpPr>
+          <p:cNvPr id="16" name="Rectangle 15"/>
+          <p:cNvSpPr/>
+          <p:nvPr/>
+        </p:nvSpPr>
+        <p:spPr>
+          <a:xfrm>
+            <a:off x="822960" y="3840480"/>
+            <a:ext cx="8229600" cy="4114800"/>
+          </a:xfrm>
+          <a:prstGeom prst="rect">
+            <a:avLst/>
+          </a:prstGeom>
+          <a:solidFill>
+            <a:srgbClr val="F0F4FF"/>
+          </a:solidFill>
+          <a:ln w="19050">
+            <a:solidFill>
+              <a:srgbClr val="4080C0"/>
+            </a:solidFill>
+          </a:ln>
+        </p:spPr>
+        <p:style>
+          <a:lnRef idx="1">
+            <a:schemeClr val="accent1"/>
+          </a:lnRef>
+          <a:fillRef idx="3">
+            <a:schemeClr val="accent1"/>
+          </a:fillRef>
+          <a:effectRef idx="2">
+            <a:schemeClr val="accent1"/>
+          </a:effectRef>
+          <a:fontRef idx="minor">
+            <a:schemeClr val="lt1"/>
+          </a:fontRef>
+        </p:style>
+        <p:txBody>
+          <a:bodyPr rtlCol="0" anchor="ctr" wrap="square"/>
+          <a:lstStyle/>
+          <a:p>
+            <a:pPr algn="ctr">
+              <a:defRPr sz="1800" b="1">
+                <a:solidFill>
+                  <a:srgbClr val="1A3C6E"/>
+                </a:solidFill>
+              </a:defRPr>
+            </a:pPr>
+            <a:r>
+              <a:t>消融实验结论</a:t>
+            </a:r>
+          </a:p>
+          <a:p>
+            <a:pPr>
+              <a:spcBef>
+                <a:spcPts val="1000"/>
+              </a:spcBef>
+              <a:defRPr sz="1200">
+                <a:solidFill>
+                  <a:srgbClr val="333333"/>
+                </a:solidFill>
+              </a:defRPr>
+            </a:pPr>
+            <a:r>
+              <a:t>1. 加权损失 + 自动阈值：F1 从 0.7046 提升至 0.7550，召回率达 0.8198</a:t>
+            </a:r>
+          </a:p>
+          <a:p>
+            <a:pPr>
+              <a:spcBef>
+                <a:spcPts val="1000"/>
+              </a:spcBef>
+              <a:defRPr sz="1200">
+                <a:solidFill>
+                  <a:srgbClr val="333333"/>
+                </a:solidFill>
+              </a:defRPr>
+            </a:pPr>
+            <a:r>
+              <a:t>2. 固定阈值(0.5)下加权损失反而降低 F1，说明自动阈值是必要配套策略</a:t>
+            </a:r>
+          </a:p>
+          <a:p>
+            <a:pPr>
+              <a:spcBef>
+                <a:spcPts val="1000"/>
+              </a:spcBef>
+              <a:defRPr sz="1200">
+                <a:solidFill>
+                  <a:srgbClr val="333333"/>
+                </a:solidFill>
+              </a:defRPr>
+            </a:pPr>
+            <a:r>
+              <a:t>3. 网络深度 2→5 层：AUC 0.9577→0.9589，3~4 层已能充分学习</a:t>
+            </a:r>
+          </a:p>
+          <a:p>
+            <a:pPr>
+              <a:spcBef>
+                <a:spcPts val="1000"/>
+              </a:spcBef>
+              <a:defRPr sz="1200">
+                <a:solidFill>
+                  <a:srgbClr val="333333"/>
+                </a:solidFill>
+              </a:defRPr>
+            </a:pPr>
+            <a:r>
+              <a:t>4. 5 层残差结构在稳定性前提下取得边际最优，故选定为最终方案</a:t>
             </a:r>
           </a:p>
         </p:txBody>
@@ -18417,6 +18185,30 @@
           </a:p>
         </p:txBody>
       </p:sp>
+      <p:pic xmlns:a="http://schemas.openxmlformats.org/drawingml/2006/main" xmlns:r="http://schemas.openxmlformats.org/officeDocument/2006/relationships">
+        <p:nvPicPr>
+          <p:cNvPr id="44" name="Picture 43" descr="数据理赔金额分布图.png"/>
+          <p:cNvPicPr>
+            <a:picLocks noChangeAspect="1"/>
+          </p:cNvPicPr>
+          <p:nvPr/>
+        </p:nvPicPr>
+        <p:blipFill>
+          <a:blip r:embed="rId4"/>
+          <a:stretch>
+            <a:fillRect/>
+          </a:stretch>
+        </p:blipFill>
+        <p:spPr>
+          <a:xfrm>
+            <a:off x="9144000" y="2011680"/>
+            <a:ext cx="4267200" cy="1828800"/>
+          </a:xfrm>
+          <a:prstGeom prst="rect">
+            <a:avLst/>
+          </a:prstGeom>
+        </p:spPr>
+      </p:pic>
     </p:spTree>
     <p:extLst>
       <p:ext uri="{BB962C8B-B14F-4D97-AF65-F5344CB8AC3E}">
